--- a/dist/초2/국어/대화와매체/초2_국어_대화와매체_01_듣고질문하기_학생용.pptx
+++ b/dist/초2/국어/대화와매체/초2_국어_대화와매체_01_듣고질문하기_학생용.pptx
@@ -118,38 +118,38 @@
   <p:extLst>
     <p:ext uri="{521415D9-36F7-43E2-AB2F-B90AF26B5E84}">
       <p14:sectionLst xmlns:p14="http://schemas.microsoft.com/office/powerpoint/2010/main">
-        <p14:section name="도입" id="{d6dad756-3e57-5185-4db4-32c9f9e1777c}">
+        <p14:section name="도입" id="{96a1b281-d033-8fad-4cf0-9123061f08e0}">
           <p14:sldIdLst>
             <p14:sldId id="256"/>
             <p14:sldId id="257"/>
           </p14:sldIdLst>
         </p14:section>
-        <p14:section name="개념" id="{e4ecfcd7-4d41-631a-cdaa-e16b8b2a492e}">
+        <p14:section name="개념" id="{918b92d9-7b0a-b702-161e-8f5032dec90b}">
           <p14:sldIdLst>
             <p14:sldId id="258"/>
             <p14:sldId id="259"/>
             <p14:sldId id="260"/>
           </p14:sldIdLst>
         </p14:section>
-        <p14:section name="연습" id="{ad9f3387-a6b2-f782-ff78-d8ab8d4df7ed}">
+        <p14:section name="연습" id="{aa129dbe-03ae-67aa-64ba-af7ce6108728}">
           <p14:sldIdLst>
             <p14:sldId id="261"/>
             <p14:sldId id="262"/>
             <p14:sldId id="263"/>
           </p14:sldIdLst>
         </p14:section>
-        <p14:section name="확인" id="{775ae3c8-090b-3880-a737-8622514d1faa}">
+        <p14:section name="확인" id="{34e6c933-ff44-1035-037b-12066c819cdc}">
           <p14:sldIdLst>
             <p14:sldId id="264"/>
             <p14:sldId id="265"/>
           </p14:sldIdLst>
         </p14:section>
-        <p14:section name="정리" id="{f8e0c20b-4a73-55d5-64aa-f8660b0566bc}">
+        <p14:section name="정리" id="{d67e76e3-5160-e7ec-ab39-7c2dc95d9b7d}">
           <p14:sldIdLst>
             <p14:sldId id="266"/>
           </p14:sldIdLst>
         </p14:section>
-        <p14:section name="보충" id="{2e490141-d9b6-2277-7c76-33c8cf4841a6}">
+        <p14:section name="보충" id="{a1db219a-8aaa-5bc3-25ef-d4d3c5614f59}">
           <p14:sldIdLst>
             <p14:sldId id="267"/>
           </p14:sldIdLst>

--- a/dist/초2/국어/대화와매체/초2_국어_대화와매체_01_듣고질문하기_학생용.pptx
+++ b/dist/초2/국어/대화와매체/초2_국어_대화와매체_01_듣고질문하기_학생용.pptx
@@ -118,38 +118,38 @@
   <p:extLst>
     <p:ext uri="{521415D9-36F7-43E2-AB2F-B90AF26B5E84}">
       <p14:sectionLst xmlns:p14="http://schemas.microsoft.com/office/powerpoint/2010/main">
-        <p14:section name="도입" id="{96a1b281-d033-8fad-4cf0-9123061f08e0}">
+        <p14:section name="도입" id="{4255705e-aa21-60a0-6db1-fc10c6b99ce2}">
           <p14:sldIdLst>
             <p14:sldId id="256"/>
             <p14:sldId id="257"/>
           </p14:sldIdLst>
         </p14:section>
-        <p14:section name="개념" id="{918b92d9-7b0a-b702-161e-8f5032dec90b}">
+        <p14:section name="개념" id="{9631d41e-faff-1f12-9d8b-76095d7ef530}">
           <p14:sldIdLst>
             <p14:sldId id="258"/>
             <p14:sldId id="259"/>
             <p14:sldId id="260"/>
           </p14:sldIdLst>
         </p14:section>
-        <p14:section name="연습" id="{aa129dbe-03ae-67aa-64ba-af7ce6108728}">
+        <p14:section name="연습" id="{4833efb7-61bb-29c2-d158-f8cc1325a562}">
           <p14:sldIdLst>
             <p14:sldId id="261"/>
             <p14:sldId id="262"/>
             <p14:sldId id="263"/>
           </p14:sldIdLst>
         </p14:section>
-        <p14:section name="확인" id="{34e6c933-ff44-1035-037b-12066c819cdc}">
+        <p14:section name="확인" id="{946a599c-0658-7bac-5cf4-78f1feb9dbf6}">
           <p14:sldIdLst>
             <p14:sldId id="264"/>
             <p14:sldId id="265"/>
           </p14:sldIdLst>
         </p14:section>
-        <p14:section name="정리" id="{d67e76e3-5160-e7ec-ab39-7c2dc95d9b7d}">
+        <p14:section name="정리" id="{40ec7d91-6956-23a6-1f29-6ff04497b568}">
           <p14:sldIdLst>
             <p14:sldId id="266"/>
           </p14:sldIdLst>
         </p14:section>
-        <p14:section name="보충" id="{a1db219a-8aaa-5bc3-25ef-d4d3c5614f59}">
+        <p14:section name="보충" id="{d2eb0ee2-7943-7465-d39a-e1fd700ed966}">
           <p14:sldIdLst>
             <p14:sldId id="267"/>
           </p14:sldIdLst>
